--- a/classes/parte-11-devsecops-y-seguridad-del-sdlc/237-modelado-de-amenazas-stride-y-dread/clase-237-presentacion.pptx
+++ b/classes/parte-11-devsecops-y-seguridad-del-sdlc/237-modelado-de-amenazas-stride-y-dread/clase-237-presentacion.pptx
@@ -17,6 +17,10 @@
     <p:sldId id="265" r:id="rId16"/>
     <p:sldId id="266" r:id="rId17"/>
     <p:sldId id="267" r:id="rId18"/>
+    <p:sldId id="268" r:id="rId19"/>
+    <p:sldId id="269" r:id="rId20"/>
+    <p:sldId id="270" r:id="rId21"/>
+    <p:sldId id="271" r:id="rId22"/>
   </p:sldIdLst>
   <p:sldSz cx="9144000" cy="6858000" type="screen4x3"/>
   <p:notesSz cx="6858000" cy="9144000"/>
@@ -3198,7 +3202,7 @@
                   <a:srgbClr val="0B3D2E"/>
                 </a:solidFill>
               </a:rPr>
-              <a:t>⚠️ Errores comunes</a:t>
+              <a:t>🧪 Laboratorio guiado</a:t>
             </a:r>
           </a:p>
         </p:txBody>
@@ -3236,67 +3240,97 @@
                   <a:srgbClr val="22282E"/>
                 </a:solidFill>
               </a:rPr>
-              <a:t>•  El DFD tiene 200 elementos y nadie lo entiende — Nivel de detalle excesivo. Modela al nivel de arquitectura, no de función.</a:t>
-            </a:r>
-          </a:p>
-          <a:p>
-            <a:pPr>
-              <a:spcAft>
-                <a:spcPts val="600"/>
-              </a:spcAft>
-            </a:pPr>
-            <a:r>
-              <a:rPr sz="1500">
-                <a:solidFill>
-                  <a:srgbClr val="22282E"/>
-                </a:solidFill>
-              </a:rPr>
-              <a:t>•  Se listan amenazas pero no mitigaciones — El modelo no aporta valor sin contramedidas accionables. Cierra el ciclo.</a:t>
-            </a:r>
-          </a:p>
-          <a:p>
-            <a:pPr>
-              <a:spcAft>
-                <a:spcPts val="600"/>
-              </a:spcAft>
-            </a:pPr>
-            <a:r>
-              <a:rPr sz="1500">
-                <a:solidFill>
-                  <a:srgbClr val="22282E"/>
-                </a:solidFill>
-              </a:rPr>
-              <a:t>•  DREAD da puntuaciones incoherentes entre personas — Es subjetivo por diseño. Calibra con guías o cambia a CVSS/ábaco de riesgo.</a:t>
-            </a:r>
-          </a:p>
-          <a:p>
-            <a:pPr>
-              <a:spcAft>
-                <a:spcPts val="600"/>
-              </a:spcAft>
-            </a:pPr>
-            <a:r>
-              <a:rPr sz="1500">
-                <a:solidFill>
-                  <a:srgbClr val="22282E"/>
-                </a:solidFill>
-              </a:rPr>
-              <a:t>•  El modelo se hace una vez y se olvida — Debe vivir con el código. Revísalo en cada cambio de arquitectura.</a:t>
-            </a:r>
-          </a:p>
-          <a:p>
-            <a:pPr>
-              <a:spcAft>
-                <a:spcPts val="600"/>
-              </a:spcAft>
-            </a:pPr>
-            <a:r>
-              <a:rPr sz="1500">
-                <a:solidFill>
-                  <a:srgbClr val="22282E"/>
-                </a:solidFill>
-              </a:rPr>
-              <a:t>•  Se ignora la categoría Repudiation — Falta pensar en logging/no repudio. Añade trazabilidad como requisito.</a:t>
+              <a:t>•  Modelaremos una app web de ejemplo: navegador → API → base de datos, con login.</a:t>
+            </a:r>
+          </a:p>
+          <a:p>
+            <a:pPr>
+              <a:spcAft>
+                <a:spcPts val="600"/>
+              </a:spcAft>
+            </a:pPr>
+            <a:r>
+              <a:rPr sz="1500">
+                <a:solidFill>
+                  <a:srgbClr val="22282E"/>
+                </a:solidFill>
+              </a:rPr>
+              <a:t>•  Define el alcance. Sistema: API REST de una tienda con autenticación por JWT, base de datos PostgreSQL y un servicio de pagos externo.</a:t>
+            </a:r>
+          </a:p>
+          <a:p>
+            <a:pPr>
+              <a:spcAft>
+                <a:spcPts val="600"/>
+              </a:spcAft>
+            </a:pPr>
+            <a:r>
+              <a:rPr sz="1500">
+                <a:solidFill>
+                  <a:srgbClr val="22282E"/>
+                </a:solidFill>
+              </a:rPr>
+              <a:t>•  Dibuja el DFD. Entidades externas (usuario, pasarela de pago), procesos (API, servicio de auth), almacén (DB), flujos entre ellos. Marca trust boundaries: internet↔API, API↔DB, API↔pasarela.</a:t>
+            </a:r>
+          </a:p>
+          <a:p>
+            <a:pPr>
+              <a:spcAft>
+                <a:spcPts val="600"/>
+              </a:spcAft>
+            </a:pPr>
+            <a:r>
+              <a:rPr sz="1500">
+                <a:solidFill>
+                  <a:srgbClr val="22282E"/>
+                </a:solidFill>
+              </a:rPr>
+              <a:t>•  Aplica STRIDE por elemento. Para el flujo "usuario → API login": Spoofing (¿se puede suplantar al usuario?), Tampering (¿se puede alterar el request?), etc. Rellena la tabla.</a:t>
+            </a:r>
+          </a:p>
+          <a:p>
+            <a:pPr>
+              <a:spcAft>
+                <a:spcPts val="600"/>
+              </a:spcAft>
+            </a:pPr>
+            <a:r>
+              <a:rPr sz="1500">
+                <a:solidFill>
+                  <a:srgbClr val="22282E"/>
+                </a:solidFill>
+              </a:rPr>
+              <a:t>•  Modela como código con pytm. Ejemplo mínimo:</a:t>
+            </a:r>
+          </a:p>
+          <a:p>
+            <a:pPr>
+              <a:spcAft>
+                <a:spcPts val="600"/>
+              </a:spcAft>
+            </a:pPr>
+            <a:r>
+              <a:rPr sz="1500">
+                <a:solidFill>
+                  <a:srgbClr val="22282E"/>
+                </a:solidFill>
+              </a:rPr>
+              <a:t>•  Ejecuta python tm.py --report y --dfd | dot -Tpng -o dfd.png.</a:t>
+            </a:r>
+          </a:p>
+          <a:p>
+            <a:pPr>
+              <a:spcAft>
+                <a:spcPts val="600"/>
+              </a:spcAft>
+            </a:pPr>
+            <a:r>
+              <a:rPr sz="1500">
+                <a:solidFill>
+                  <a:srgbClr val="22282E"/>
+                </a:solidFill>
+              </a:rPr>
+              <a:t>•  Prioriza. Para las 5 amenazas más relevantes, documenta impacto, exposición, viabilidad y controles existentes. Calcula DREAD en paralelo solo para observar cuánto cambia al variar los supuestos.</a:t>
             </a:r>
           </a:p>
         </p:txBody>
@@ -3347,7 +3381,7 @@
                   <a:srgbClr val="0B3D2E"/>
                 </a:solidFill>
               </a:rPr>
-              <a:t>❓ Preguntas frecuentes</a:t>
+              <a:t>✍️ Ejercicios</a:t>
             </a:r>
           </a:p>
         </p:txBody>
@@ -3385,97 +3419,82 @@
                   <a:srgbClr val="22282E"/>
                 </a:solidFill>
               </a:rPr>
-              <a:t>•  ❓ ¿Cuándo hago threat modeling: al inicio o continuamente?</a:t>
-            </a:r>
-          </a:p>
-          <a:p>
-            <a:pPr>
-              <a:spcAft>
-                <a:spcPts val="600"/>
-              </a:spcAft>
-            </a:pPr>
-            <a:r>
-              <a:rPr sz="1500">
-                <a:solidFill>
-                  <a:srgbClr val="22282E"/>
-                </a:solidFill>
-              </a:rPr>
-              <a:t>•  Al inicio del diseño y luego incrementalmente en cada cambio arquitectónico significativo. Es un documento vivo, no un entregable único.</a:t>
-            </a:r>
-          </a:p>
-          <a:p>
-            <a:pPr>
-              <a:spcAft>
-                <a:spcPts val="600"/>
-              </a:spcAft>
-            </a:pPr>
-            <a:r>
-              <a:rPr sz="1500">
-                <a:solidFill>
-                  <a:srgbClr val="22282E"/>
-                </a:solidFill>
-              </a:rPr>
-              <a:t>•  ❓ ¿STRIDE cubre todas las amenazas posibles?</a:t>
-            </a:r>
-          </a:p>
-          <a:p>
-            <a:pPr>
-              <a:spcAft>
-                <a:spcPts val="600"/>
-              </a:spcAft>
-            </a:pPr>
-            <a:r>
-              <a:rPr sz="1500">
-                <a:solidFill>
-                  <a:srgbClr val="22282E"/>
-                </a:solidFill>
-              </a:rPr>
-              <a:t>•  No, pero da una cobertura sistemática de las categorías más comunes. Complementa con árboles de ataque o MITRE ATT&amp;CK para escenarios específicos.</a:t>
-            </a:r>
-          </a:p>
-          <a:p>
-            <a:pPr>
-              <a:spcAft>
-                <a:spcPts val="600"/>
-              </a:spcAft>
-            </a:pPr>
-            <a:r>
-              <a:rPr sz="1500">
-                <a:solidFill>
-                  <a:srgbClr val="22282E"/>
-                </a:solidFill>
-              </a:rPr>
-              <a:t>•  ❓ ¿Vale la pena DREAD si Microsoft lo abandonó?</a:t>
-            </a:r>
-          </a:p>
-          <a:p>
-            <a:pPr>
-              <a:spcAft>
-                <a:spcPts val="600"/>
-              </a:spcAft>
-            </a:pPr>
-            <a:r>
-              <a:rPr sz="1500">
-                <a:solidFill>
-                  <a:srgbClr val="22282E"/>
-                </a:solidFill>
-              </a:rPr>
-              <a:t>•  Como introducción pedagógica sí; en producción muchos equipos prefieren CVSS o una matriz probabilidad×impacto por su mayor consistencia.</a:t>
-            </a:r>
-          </a:p>
-          <a:p>
-            <a:pPr>
-              <a:spcAft>
-                <a:spcPts val="600"/>
-              </a:spcAft>
-            </a:pPr>
-            <a:r>
-              <a:rPr sz="1500">
-                <a:solidFill>
-                  <a:srgbClr val="22282E"/>
-                </a:solidFill>
-              </a:rPr>
-              <a:t>•  ❓ ¿Puedo automatizar el modelado de amenazas?</a:t>
+              <a:t>•  Dibuja el DFD de un formulario de contacto con almacenamiento en base de datos.</a:t>
+            </a:r>
+          </a:p>
+          <a:p>
+            <a:pPr>
+              <a:spcAft>
+                <a:spcPts val="600"/>
+              </a:spcAft>
+            </a:pPr>
+            <a:r>
+              <a:rPr sz="1500">
+                <a:solidFill>
+                  <a:srgbClr val="22282E"/>
+                </a:solidFill>
+              </a:rPr>
+              <a:t>•  Aplica STRIDE al flujo "API → servicio de pagos externo" y lista 6 amenazas.</a:t>
+            </a:r>
+          </a:p>
+          <a:p>
+            <a:pPr>
+              <a:spcAft>
+                <a:spcPts val="600"/>
+              </a:spcAft>
+            </a:pPr>
+            <a:r>
+              <a:rPr sz="1500">
+                <a:solidFill>
+                  <a:srgbClr val="22282E"/>
+                </a:solidFill>
+              </a:rPr>
+              <a:t>•  Puntúa dos amenazas con DREAD y argumenta por qué el scoring es discutible.</a:t>
+            </a:r>
+          </a:p>
+          <a:p>
+            <a:pPr>
+              <a:spcAft>
+                <a:spcPts val="600"/>
+              </a:spcAft>
+            </a:pPr>
+            <a:r>
+              <a:rPr sz="1500">
+                <a:solidFill>
+                  <a:srgbClr val="22282E"/>
+                </a:solidFill>
+              </a:rPr>
+              <a:t>•  Convierte tres amenazas en requisitos de seguridad verificables.</a:t>
+            </a:r>
+          </a:p>
+          <a:p>
+            <a:pPr>
+              <a:spcAft>
+                <a:spcPts val="600"/>
+              </a:spcAft>
+            </a:pPr>
+            <a:r>
+              <a:rPr sz="1500">
+                <a:solidFill>
+                  <a:srgbClr val="22282E"/>
+                </a:solidFill>
+              </a:rPr>
+              <a:t>•  Modela con pytm un sistema con dos trust boundaries y genera el informe.</a:t>
+            </a:r>
+          </a:p>
+          <a:p>
+            <a:pPr>
+              <a:spcAft>
+                <a:spcPts val="600"/>
+              </a:spcAft>
+            </a:pPr>
+            <a:r>
+              <a:rPr sz="1500">
+                <a:solidFill>
+                  <a:srgbClr val="22282E"/>
+                </a:solidFill>
+              </a:rPr>
+              <a:t>•  Propón una alternativa a DREAD y justifica cuándo la usarías.</a:t>
             </a:r>
           </a:p>
         </p:txBody>
@@ -3526,7 +3545,7 @@
                   <a:srgbClr val="0B3D2E"/>
                 </a:solidFill>
               </a:rPr>
-              <a:t>🔗 Referencias</a:t>
+              <a:t>📝 Reto verificable</a:t>
             </a:r>
           </a:p>
         </p:txBody>
@@ -3564,6 +3583,483 @@
                   <a:srgbClr val="22282E"/>
                 </a:solidFill>
               </a:rPr>
+              <a:t>•  Entrega un modelo de amenazas completo de un sistema con al menos dos trust boundaries.</a:t>
+            </a:r>
+          </a:p>
+          <a:p>
+            <a:pPr>
+              <a:spcAft>
+                <a:spcPts val="600"/>
+              </a:spcAft>
+            </a:pPr>
+            <a:r>
+              <a:rPr sz="1500">
+                <a:solidFill>
+                  <a:srgbClr val="22282E"/>
+                </a:solidFill>
+              </a:rPr>
+              <a:t>•  Criterio de aceptación: incluye (a) un DFD con procesos, almacenes, flujos y límites de</a:t>
+            </a:r>
+          </a:p>
+          <a:p>
+            <a:pPr>
+              <a:spcAft>
+                <a:spcPts val="600"/>
+              </a:spcAft>
+            </a:pPr>
+            <a:r>
+              <a:rPr sz="1500">
+                <a:solidFill>
+                  <a:srgbClr val="22282E"/>
+                </a:solidFill>
+              </a:rPr>
+              <a:t>•  confianza; (b) una tabla STRIDE con mínimo 8 amenazas categorizadas; (c) priorización</a:t>
+            </a:r>
+          </a:p>
+          <a:p>
+            <a:pPr>
+              <a:spcAft>
+                <a:spcPts val="600"/>
+              </a:spcAft>
+            </a:pPr>
+            <a:r>
+              <a:rPr sz="1500">
+                <a:solidFill>
+                  <a:srgbClr val="22282E"/>
+                </a:solidFill>
+              </a:rPr>
+              <a:t>•  justificada de al menos 5; y (d) una contramedida/requisito verificable por cada amenaza</a:t>
+            </a:r>
+          </a:p>
+          <a:p>
+            <a:pPr>
+              <a:spcAft>
+                <a:spcPts val="600"/>
+              </a:spcAft>
+            </a:pPr>
+            <a:r>
+              <a:rPr sz="1500">
+                <a:solidFill>
+                  <a:srgbClr val="22282E"/>
+                </a:solidFill>
+              </a:rPr>
+              <a:t>•  priorizada. El modelo debe ser versionable (Threat Dragon JSON o pytm).</a:t>
+            </a:r>
+          </a:p>
+        </p:txBody>
+      </p:sp>
+    </p:spTree>
+  </p:cSld>
+  <p:clrMapOvr>
+    <a:masterClrMapping/>
+  </p:clrMapOvr>
+</p:sld>
+</file>
+
+<file path=ppt/slides/slide13.xml><?xml version="1.0" encoding="utf-8"?>
+<p:sld xmlns:a="http://schemas.openxmlformats.org/drawingml/2006/main" xmlns:p="http://schemas.openxmlformats.org/presentationml/2006/main" xmlns:r="http://schemas.openxmlformats.org/officeDocument/2006/relationships">
+  <p:cSld>
+    <p:spTree>
+      <p:nvGrpSpPr>
+        <p:cNvPr id="1" name=""/>
+        <p:cNvGrpSpPr/>
+        <p:nvPr/>
+      </p:nvGrpSpPr>
+      <p:grpSpPr/>
+      <p:sp>
+        <p:nvSpPr>
+          <p:cNvPr id="2" name="TextBox 1"/>
+          <p:cNvSpPr txBox="1"/>
+          <p:nvPr/>
+        </p:nvSpPr>
+        <p:spPr>
+          <a:xfrm>
+            <a:off x="457200" y="320040"/>
+            <a:ext cx="8229600" cy="822960"/>
+          </a:xfrm>
+          <a:prstGeom prst="rect">
+            <a:avLst/>
+          </a:prstGeom>
+          <a:noFill/>
+        </p:spPr>
+        <p:txBody>
+          <a:bodyPr wrap="square">
+            <a:spAutoFit/>
+          </a:bodyPr>
+          <a:lstStyle/>
+          <a:p>
+            <a:r>
+              <a:rPr sz="2600" b="1">
+                <a:solidFill>
+                  <a:srgbClr val="0B3D2E"/>
+                </a:solidFill>
+              </a:rPr>
+              <a:t>⚠️ Errores comunes</a:t>
+            </a:r>
+          </a:p>
+        </p:txBody>
+      </p:sp>
+      <p:sp>
+        <p:nvSpPr>
+          <p:cNvPr id="3" name="TextBox 2"/>
+          <p:cNvSpPr txBox="1"/>
+          <p:nvPr/>
+        </p:nvSpPr>
+        <p:spPr>
+          <a:xfrm>
+            <a:off x="457200" y="1280160"/>
+            <a:ext cx="8229600" cy="4937760"/>
+          </a:xfrm>
+          <a:prstGeom prst="rect">
+            <a:avLst/>
+          </a:prstGeom>
+          <a:noFill/>
+        </p:spPr>
+        <p:txBody>
+          <a:bodyPr wrap="square">
+            <a:spAutoFit/>
+          </a:bodyPr>
+          <a:lstStyle/>
+          <a:p>
+            <a:pPr>
+              <a:spcAft>
+                <a:spcPts val="600"/>
+              </a:spcAft>
+            </a:pPr>
+            <a:r>
+              <a:rPr sz="1500">
+                <a:solidFill>
+                  <a:srgbClr val="22282E"/>
+                </a:solidFill>
+              </a:rPr>
+              <a:t>•  El DFD tiene 200 elementos y nadie lo entiende — Nivel de detalle excesivo. Modela al nivel de arquitectura, no de función.</a:t>
+            </a:r>
+          </a:p>
+          <a:p>
+            <a:pPr>
+              <a:spcAft>
+                <a:spcPts val="600"/>
+              </a:spcAft>
+            </a:pPr>
+            <a:r>
+              <a:rPr sz="1500">
+                <a:solidFill>
+                  <a:srgbClr val="22282E"/>
+                </a:solidFill>
+              </a:rPr>
+              <a:t>•  Se listan amenazas pero no mitigaciones — El modelo no aporta valor sin contramedidas accionables. Cierra el ciclo.</a:t>
+            </a:r>
+          </a:p>
+          <a:p>
+            <a:pPr>
+              <a:spcAft>
+                <a:spcPts val="600"/>
+              </a:spcAft>
+            </a:pPr>
+            <a:r>
+              <a:rPr sz="1500">
+                <a:solidFill>
+                  <a:srgbClr val="22282E"/>
+                </a:solidFill>
+              </a:rPr>
+              <a:t>•  DREAD da puntuaciones incoherentes entre personas — Sus escalas dependen del juicio. Conserva los supuestos y prioriza mediante impacto, exposición, viabilidad y controles; CVSS responde a…</a:t>
+            </a:r>
+          </a:p>
+          <a:p>
+            <a:pPr>
+              <a:spcAft>
+                <a:spcPts val="600"/>
+              </a:spcAft>
+            </a:pPr>
+            <a:r>
+              <a:rPr sz="1500">
+                <a:solidFill>
+                  <a:srgbClr val="22282E"/>
+                </a:solidFill>
+              </a:rPr>
+              <a:t>•  El modelo se hace una vez y se olvida — Debe vivir con el código. Revísalo en cada cambio de arquitectura.</a:t>
+            </a:r>
+          </a:p>
+          <a:p>
+            <a:pPr>
+              <a:spcAft>
+                <a:spcPts val="600"/>
+              </a:spcAft>
+            </a:pPr>
+            <a:r>
+              <a:rPr sz="1500">
+                <a:solidFill>
+                  <a:srgbClr val="22282E"/>
+                </a:solidFill>
+              </a:rPr>
+              <a:t>•  Se ignora la categoría Repudiation — Falta pensar en logging/no repudio. Añade trazabilidad como requisito.</a:t>
+            </a:r>
+          </a:p>
+        </p:txBody>
+      </p:sp>
+    </p:spTree>
+  </p:cSld>
+  <p:clrMapOvr>
+    <a:masterClrMapping/>
+  </p:clrMapOvr>
+</p:sld>
+</file>
+
+<file path=ppt/slides/slide14.xml><?xml version="1.0" encoding="utf-8"?>
+<p:sld xmlns:a="http://schemas.openxmlformats.org/drawingml/2006/main" xmlns:p="http://schemas.openxmlformats.org/presentationml/2006/main" xmlns:r="http://schemas.openxmlformats.org/officeDocument/2006/relationships">
+  <p:cSld>
+    <p:spTree>
+      <p:nvGrpSpPr>
+        <p:cNvPr id="1" name=""/>
+        <p:cNvGrpSpPr/>
+        <p:nvPr/>
+      </p:nvGrpSpPr>
+      <p:grpSpPr/>
+      <p:sp>
+        <p:nvSpPr>
+          <p:cNvPr id="2" name="TextBox 1"/>
+          <p:cNvSpPr txBox="1"/>
+          <p:nvPr/>
+        </p:nvSpPr>
+        <p:spPr>
+          <a:xfrm>
+            <a:off x="457200" y="320040"/>
+            <a:ext cx="8229600" cy="822960"/>
+          </a:xfrm>
+          <a:prstGeom prst="rect">
+            <a:avLst/>
+          </a:prstGeom>
+          <a:noFill/>
+        </p:spPr>
+        <p:txBody>
+          <a:bodyPr wrap="square">
+            <a:spAutoFit/>
+          </a:bodyPr>
+          <a:lstStyle/>
+          <a:p>
+            <a:r>
+              <a:rPr sz="2600" b="1">
+                <a:solidFill>
+                  <a:srgbClr val="0B3D2E"/>
+                </a:solidFill>
+              </a:rPr>
+              <a:t>❓ Preguntas frecuentes</a:t>
+            </a:r>
+          </a:p>
+        </p:txBody>
+      </p:sp>
+      <p:sp>
+        <p:nvSpPr>
+          <p:cNvPr id="3" name="TextBox 2"/>
+          <p:cNvSpPr txBox="1"/>
+          <p:nvPr/>
+        </p:nvSpPr>
+        <p:spPr>
+          <a:xfrm>
+            <a:off x="457200" y="1280160"/>
+            <a:ext cx="8229600" cy="4937760"/>
+          </a:xfrm>
+          <a:prstGeom prst="rect">
+            <a:avLst/>
+          </a:prstGeom>
+          <a:noFill/>
+        </p:spPr>
+        <p:txBody>
+          <a:bodyPr wrap="square">
+            <a:spAutoFit/>
+          </a:bodyPr>
+          <a:lstStyle/>
+          <a:p>
+            <a:pPr>
+              <a:spcAft>
+                <a:spcPts val="600"/>
+              </a:spcAft>
+            </a:pPr>
+            <a:r>
+              <a:rPr sz="1500">
+                <a:solidFill>
+                  <a:srgbClr val="22282E"/>
+                </a:solidFill>
+              </a:rPr>
+              <a:t>•  ❓ ¿Cuándo hago threat modeling: al inicio o continuamente?</a:t>
+            </a:r>
+          </a:p>
+          <a:p>
+            <a:pPr>
+              <a:spcAft>
+                <a:spcPts val="600"/>
+              </a:spcAft>
+            </a:pPr>
+            <a:r>
+              <a:rPr sz="1500">
+                <a:solidFill>
+                  <a:srgbClr val="22282E"/>
+                </a:solidFill>
+              </a:rPr>
+              <a:t>•  Al inicio del diseño y luego incrementalmente en cada cambio arquitectónico significativo. Es un documento vivo, no un entregable único.</a:t>
+            </a:r>
+          </a:p>
+          <a:p>
+            <a:pPr>
+              <a:spcAft>
+                <a:spcPts val="600"/>
+              </a:spcAft>
+            </a:pPr>
+            <a:r>
+              <a:rPr sz="1500">
+                <a:solidFill>
+                  <a:srgbClr val="22282E"/>
+                </a:solidFill>
+              </a:rPr>
+              <a:t>•  ❓ ¿STRIDE cubre todas las amenazas posibles?</a:t>
+            </a:r>
+          </a:p>
+          <a:p>
+            <a:pPr>
+              <a:spcAft>
+                <a:spcPts val="600"/>
+              </a:spcAft>
+            </a:pPr>
+            <a:r>
+              <a:rPr sz="1500">
+                <a:solidFill>
+                  <a:srgbClr val="22282E"/>
+                </a:solidFill>
+              </a:rPr>
+              <a:t>•  No, pero da una cobertura sistemática de las categorías más comunes. Complementa con árboles de ataque o MITRE ATT&amp;CK para escenarios específicos.</a:t>
+            </a:r>
+          </a:p>
+          <a:p>
+            <a:pPr>
+              <a:spcAft>
+                <a:spcPts val="600"/>
+              </a:spcAft>
+            </a:pPr>
+            <a:r>
+              <a:rPr sz="1500">
+                <a:solidFill>
+                  <a:srgbClr val="22282E"/>
+                </a:solidFill>
+              </a:rPr>
+              <a:t>•  ❓ ¿Vale la pena DREAD si Microsoft lo abandonó?</a:t>
+            </a:r>
+          </a:p>
+          <a:p>
+            <a:pPr>
+              <a:spcAft>
+                <a:spcPts val="600"/>
+              </a:spcAft>
+            </a:pPr>
+            <a:r>
+              <a:rPr sz="1500">
+                <a:solidFill>
+                  <a:srgbClr val="22282E"/>
+                </a:solidFill>
+              </a:rPr>
+              <a:t>•  Sirve para observar los problemas de un puntaje subjetivo. En un modelo real conviene documentar impacto, exposición, viabilidad y controles con escalas calibradas para la organización. CVSS puede…</a:t>
+            </a:r>
+          </a:p>
+          <a:p>
+            <a:pPr>
+              <a:spcAft>
+                <a:spcPts val="600"/>
+              </a:spcAft>
+            </a:pPr>
+            <a:r>
+              <a:rPr sz="1500">
+                <a:solidFill>
+                  <a:srgbClr val="22282E"/>
+                </a:solidFill>
+              </a:rPr>
+              <a:t>•  ❓ ¿Puedo automatizar el modelado de amenazas?</a:t>
+            </a:r>
+          </a:p>
+        </p:txBody>
+      </p:sp>
+    </p:spTree>
+  </p:cSld>
+  <p:clrMapOvr>
+    <a:masterClrMapping/>
+  </p:clrMapOvr>
+</p:sld>
+</file>
+
+<file path=ppt/slides/slide15.xml><?xml version="1.0" encoding="utf-8"?>
+<p:sld xmlns:a="http://schemas.openxmlformats.org/drawingml/2006/main" xmlns:p="http://schemas.openxmlformats.org/presentationml/2006/main" xmlns:r="http://schemas.openxmlformats.org/officeDocument/2006/relationships">
+  <p:cSld>
+    <p:spTree>
+      <p:nvGrpSpPr>
+        <p:cNvPr id="1" name=""/>
+        <p:cNvGrpSpPr/>
+        <p:nvPr/>
+      </p:nvGrpSpPr>
+      <p:grpSpPr/>
+      <p:sp>
+        <p:nvSpPr>
+          <p:cNvPr id="2" name="TextBox 1"/>
+          <p:cNvSpPr txBox="1"/>
+          <p:nvPr/>
+        </p:nvSpPr>
+        <p:spPr>
+          <a:xfrm>
+            <a:off x="457200" y="320040"/>
+            <a:ext cx="8229600" cy="822960"/>
+          </a:xfrm>
+          <a:prstGeom prst="rect">
+            <a:avLst/>
+          </a:prstGeom>
+          <a:noFill/>
+        </p:spPr>
+        <p:txBody>
+          <a:bodyPr wrap="square">
+            <a:spAutoFit/>
+          </a:bodyPr>
+          <a:lstStyle/>
+          <a:p>
+            <a:r>
+              <a:rPr sz="2600" b="1">
+                <a:solidFill>
+                  <a:srgbClr val="0B3D2E"/>
+                </a:solidFill>
+              </a:rPr>
+              <a:t>🔗 Referencias</a:t>
+            </a:r>
+          </a:p>
+        </p:txBody>
+      </p:sp>
+      <p:sp>
+        <p:nvSpPr>
+          <p:cNvPr id="3" name="TextBox 2"/>
+          <p:cNvSpPr txBox="1"/>
+          <p:nvPr/>
+        </p:nvSpPr>
+        <p:spPr>
+          <a:xfrm>
+            <a:off x="457200" y="1280160"/>
+            <a:ext cx="8229600" cy="4937760"/>
+          </a:xfrm>
+          <a:prstGeom prst="rect">
+            <a:avLst/>
+          </a:prstGeom>
+          <a:noFill/>
+        </p:spPr>
+        <p:txBody>
+          <a:bodyPr wrap="square">
+            <a:spAutoFit/>
+          </a:bodyPr>
+          <a:lstStyle/>
+          <a:p>
+            <a:pPr>
+              <a:spcAft>
+                <a:spcPts val="600"/>
+              </a:spcAft>
+            </a:pPr>
+            <a:r>
+              <a:rPr sz="1500">
+                <a:solidFill>
+                  <a:srgbClr val="22282E"/>
+                </a:solidFill>
+              </a:rPr>
               <a:t>•  Adam Shostack, Threat Modeling: Designing for Security, Wiley 2014.</a:t>
             </a:r>
           </a:p>
@@ -3629,6 +4125,81 @@
           </a:p>
         </p:txBody>
       </p:sp>
+    </p:spTree>
+  </p:cSld>
+  <p:clrMapOvr>
+    <a:masterClrMapping/>
+  </p:clrMapOvr>
+</p:sld>
+</file>
+
+<file path=ppt/slides/slide16.xml><?xml version="1.0" encoding="utf-8"?>
+<p:sld xmlns:a="http://schemas.openxmlformats.org/drawingml/2006/main" xmlns:p="http://schemas.openxmlformats.org/presentationml/2006/main" xmlns:r="http://schemas.openxmlformats.org/officeDocument/2006/relationships">
+  <p:cSld>
+    <p:spTree>
+      <p:nvGrpSpPr>
+        <p:cNvPr id="1" name=""/>
+        <p:cNvGrpSpPr/>
+        <p:nvPr/>
+      </p:nvGrpSpPr>
+      <p:grpSpPr/>
+      <p:sp>
+        <p:nvSpPr>
+          <p:cNvPr id="2" name="TextBox 1"/>
+          <p:cNvSpPr txBox="1"/>
+          <p:nvPr/>
+        </p:nvSpPr>
+        <p:spPr>
+          <a:xfrm>
+            <a:off x="457200" y="274320"/>
+            <a:ext cx="8229600" cy="640080"/>
+          </a:xfrm>
+          <a:prstGeom prst="rect">
+            <a:avLst/>
+          </a:prstGeom>
+          <a:noFill/>
+        </p:spPr>
+        <p:txBody>
+          <a:bodyPr wrap="square">
+            <a:spAutoFit/>
+          </a:bodyPr>
+          <a:lstStyle/>
+          <a:p>
+            <a:r>
+              <a:rPr sz="2200" b="1">
+                <a:solidFill>
+                  <a:srgbClr val="0B3D2E"/>
+                </a:solidFill>
+              </a:rPr>
+              <a:t>Diagrama de la clase</a:t>
+            </a:r>
+          </a:p>
+        </p:txBody>
+      </p:sp>
+      <p:pic>
+        <p:nvPicPr>
+          <p:cNvPr id="3" name="Picture 2" descr="99be1291c26b1f78.png"/>
+          <p:cNvPicPr>
+            <a:picLocks noChangeAspect="1"/>
+          </p:cNvPicPr>
+          <p:nvPr/>
+        </p:nvPicPr>
+        <p:blipFill>
+          <a:blip r:embed="rId2"/>
+          <a:stretch>
+            <a:fillRect/>
+          </a:stretch>
+        </p:blipFill>
+        <p:spPr>
+          <a:xfrm>
+            <a:off x="457200" y="2898648"/>
+            <a:ext cx="8229600" cy="1700784"/>
+          </a:xfrm>
+          <a:prstGeom prst="rect">
+            <a:avLst/>
+          </a:prstGeom>
+        </p:spPr>
+      </p:pic>
     </p:spTree>
   </p:cSld>
   <p:clrMapOvr>
@@ -4167,7 +4738,7 @@
                   <a:srgbClr val="0B3D2E"/>
                 </a:solidFill>
               </a:rPr>
-              <a:t>📖 Definiciones y características</a:t>
+              <a:t>🧠 Explicación en profundidad</a:t>
             </a:r>
           </a:p>
         </p:txBody>
@@ -4205,82 +4776,82 @@
                   <a:srgbClr val="22282E"/>
                 </a:solidFill>
               </a:rPr>
-              <a:t>•  Modelo de amenazas: representación estructurada de qué puede atacar a un sistema y cómo mitigarlo. Característica: se hace en fase de diseño, es barato y preventivo.</a:t>
-            </a:r>
-          </a:p>
-          <a:p>
-            <a:pPr>
-              <a:spcAft>
-                <a:spcPts val="600"/>
-              </a:spcAft>
-            </a:pPr>
-            <a:r>
-              <a:rPr sz="1500">
-                <a:solidFill>
-                  <a:srgbClr val="22282E"/>
-                </a:solidFill>
-              </a:rPr>
-              <a:t>•  DFD: diagrama con procesos, almacenes de datos, flujos y entidades externas. Característica: los cruces de trust boundary son los puntos calientes.</a:t>
-            </a:r>
-          </a:p>
-          <a:p>
-            <a:pPr>
-              <a:spcAft>
-                <a:spcPts val="600"/>
-              </a:spcAft>
-            </a:pPr>
-            <a:r>
-              <a:rPr sz="1500">
-                <a:solidFill>
-                  <a:srgbClr val="22282E"/>
-                </a:solidFill>
-              </a:rPr>
-              <a:t>•  STRIDE: Spoofing, Tampering, Repudiation, Information disclosure, Denial of service, Elevation of privilege. Característica: cada categoría se opone a una propiedad de seguridad (autenticación, integridad, no repudio, confidencialidad, disponibilidad, autorización).</a:t>
-            </a:r>
-          </a:p>
-          <a:p>
-            <a:pPr>
-              <a:spcAft>
-                <a:spcPts val="600"/>
-              </a:spcAft>
-            </a:pPr>
-            <a:r>
-              <a:rPr sz="1500">
-                <a:solidFill>
-                  <a:srgbClr val="22282E"/>
-                </a:solidFill>
-              </a:rPr>
-              <a:t>•  DREAD: Damage, Reproducibility, Exploitability, Affected users, Discoverability. Característica: scoring 1–10 por eje; útil pero subjetivo, Microsoft lo abandonó por inconsistencia.</a:t>
-            </a:r>
-          </a:p>
-          <a:p>
-            <a:pPr>
-              <a:spcAft>
-                <a:spcPts val="600"/>
-              </a:spcAft>
-            </a:pPr>
-            <a:r>
-              <a:rPr sz="1500">
-                <a:solidFill>
-                  <a:srgbClr val="22282E"/>
-                </a:solidFill>
-              </a:rPr>
-              <a:t>•  Trust boundary: frontera donde datos o control pasan entre niveles de confianza distintos. Característica: internet↔DMZ, usuario↔proceso, contenedor↔host.</a:t>
-            </a:r>
-          </a:p>
-          <a:p>
-            <a:pPr>
-              <a:spcAft>
-                <a:spcPts val="600"/>
-              </a:spcAft>
-            </a:pPr>
-            <a:r>
-              <a:rPr sz="1500">
-                <a:solidFill>
-                  <a:srgbClr val="22282E"/>
-                </a:solidFill>
-              </a:rPr>
-              <a:t>•  Contramedida (mitigación): control que reduce la probabilidad o el impacto de una amenaza. Característica: se traduce en requisito verificable.</a:t>
+              <a:t>•  Un modelo de amenazas es una explicación estructurada de qué se protege, de quién, por dónde podría fallar y qué se hará al respecto. No intenta predecir todos los ataques ni reemplaza las pruebas.…</a:t>
+            </a:r>
+          </a:p>
+          <a:p>
+            <a:pPr>
+              <a:spcAft>
+                <a:spcPts val="600"/>
+              </a:spcAft>
+            </a:pPr>
+            <a:r>
+              <a:rPr sz="1500">
+                <a:solidFill>
+                  <a:srgbClr val="22282E"/>
+                </a:solidFill>
+              </a:rPr>
+              <a:t>•  El punto de partida no es STRIDE sino el sistema: activos, objetivos de seguridad, actores, componentes, almacenes, flujos y límites de confianza. En un diagrama de flujo de datos, un límite indica…</a:t>
+            </a:r>
+          </a:p>
+          <a:p>
+            <a:pPr>
+              <a:spcAft>
+                <a:spcPts val="600"/>
+              </a:spcAft>
+            </a:pPr>
+            <a:r>
+              <a:rPr sz="1500">
+                <a:solidFill>
+                  <a:srgbClr val="22282E"/>
+                </a:solidFill>
+              </a:rPr>
+              <a:t>•  Al leer el diagrama se observa que el token cruza desde una zona menos confiable hacia la API; que la API concentra decisiones de autorización; y que la cola crea un flujo asíncrono con identidad…</a:t>
+            </a:r>
+          </a:p>
+          <a:p>
+            <a:pPr>
+              <a:spcAft>
+                <a:spcPts val="600"/>
+              </a:spcAft>
+            </a:pPr>
+            <a:r>
+              <a:rPr sz="1500">
+                <a:solidFill>
+                  <a:srgbClr val="22282E"/>
+                </a:solidFill>
+              </a:rPr>
+              <a:t>•  DREAD popularizó puntuar daño, reproducibilidad, explotabilidad, usuarios afectados y descubribilidad. Puede facilitar una conversación, pero sumar escalas ordinales no convierte el resultado en…</a:t>
+            </a:r>
+          </a:p>
+          <a:p>
+            <a:pPr>
+              <a:spcAft>
+                <a:spcPts val="600"/>
+              </a:spcAft>
+            </a:pPr>
+            <a:r>
+              <a:rPr sz="1500">
+                <a:solidFill>
+                  <a:srgbClr val="22282E"/>
+                </a:solidFill>
+              </a:rPr>
+              <a:t>•  Una amenaza se cierra de cuatro maneras documentadas: mitigar, evitar, transferir o aceptar. «Usamos TLS» no cierra una amenaza de suplantación si el atacante puede robar una sesión; «hay logs» no…</a:t>
+            </a:r>
+          </a:p>
+          <a:p>
+            <a:pPr>
+              <a:spcAft>
+                <a:spcPts val="600"/>
+              </a:spcAft>
+            </a:pPr>
+            <a:r>
+              <a:rPr sz="1500">
+                <a:solidFill>
+                  <a:srgbClr val="22282E"/>
+                </a:solidFill>
+              </a:rPr>
+              <a:t>•  El equipo modela un flujo de recuperación de contraseña. Identifica suplantación si el token es predecible, divulgación si aparece en logs o cabeceras de referencia, manipulación si el usuario…</a:t>
             </a:r>
           </a:p>
         </p:txBody>
@@ -4331,7 +4902,7 @@
                   <a:srgbClr val="0B3D2E"/>
                 </a:solidFill>
               </a:rPr>
-              <a:t>🧰 Herramientas y preparación</a:t>
+              <a:t>📔 Glosario operativo</a:t>
             </a:r>
           </a:p>
         </p:txBody>
@@ -4369,82 +4940,82 @@
                   <a:srgbClr val="22282E"/>
                 </a:solidFill>
               </a:rPr>
-              <a:t>•  OWASP Threat Dragon (app de escritorio/web) para dibujar DFD y anotar amenazas STRIDE.</a:t>
-            </a:r>
-          </a:p>
-          <a:p>
-            <a:pPr>
-              <a:spcAft>
-                <a:spcPts val="600"/>
-              </a:spcAft>
-            </a:pPr>
-            <a:r>
-              <a:rPr sz="1500">
-                <a:solidFill>
-                  <a:srgbClr val="22282E"/>
-                </a:solidFill>
-              </a:rPr>
-              <a:t>•  pytm (Python) para modelar amenazas como código y generar el DFD e informe.</a:t>
-            </a:r>
-          </a:p>
-          <a:p>
-            <a:pPr>
-              <a:spcAft>
-                <a:spcPts val="600"/>
-              </a:spcAft>
-            </a:pPr>
-            <a:r>
-              <a:rPr sz="1500">
-                <a:solidFill>
-                  <a:srgbClr val="22282E"/>
-                </a:solidFill>
-              </a:rPr>
-              <a:t>•  Microsoft Threat Modeling Tool (Windows) como alternativa gráfica.</a:t>
-            </a:r>
-          </a:p>
-          <a:p>
-            <a:pPr>
-              <a:spcAft>
-                <a:spcPts val="600"/>
-              </a:spcAft>
-            </a:pPr>
-            <a:r>
-              <a:rPr sz="1500">
-                <a:solidFill>
-                  <a:srgbClr val="22282E"/>
-                </a:solidFill>
-              </a:rPr>
-              <a:t>•  Plantilla de tabla de amenazas (elemento | STRIDE | descripción | riesgo | mitigación).</a:t>
-            </a:r>
-          </a:p>
-          <a:p>
-            <a:pPr>
-              <a:spcAft>
-                <a:spcPts val="600"/>
-              </a:spcAft>
-            </a:pPr>
-            <a:r>
-              <a:rPr sz="1500">
-                <a:solidFill>
-                  <a:srgbClr val="22282E"/>
-                </a:solidFill>
-              </a:rPr>
-              <a:t>•  Instalación de pytm:</a:t>
-            </a:r>
-          </a:p>
-          <a:p>
-            <a:pPr>
-              <a:spcAft>
-                <a:spcPts val="600"/>
-              </a:spcAft>
-            </a:pPr>
-            <a:r>
-              <a:rPr sz="1500">
-                <a:solidFill>
-                  <a:srgbClr val="22282E"/>
-                </a:solidFill>
-              </a:rPr>
-              <a:t>•  pip install pytm</a:t>
+              <a:t>•  Término — Definición útil</a:t>
+            </a:r>
+          </a:p>
+          <a:p>
+            <a:pPr>
+              <a:spcAft>
+                <a:spcPts val="600"/>
+              </a:spcAft>
+            </a:pPr>
+            <a:r>
+              <a:rPr sz="1500">
+                <a:solidFill>
+                  <a:srgbClr val="22282E"/>
+                </a:solidFill>
+              </a:rPr>
+              <a:t>•  Activo — Información, capacidad o servicio cuyo daño importa al negocio o usuario.</a:t>
+            </a:r>
+          </a:p>
+          <a:p>
+            <a:pPr>
+              <a:spcAft>
+                <a:spcPts val="600"/>
+              </a:spcAft>
+            </a:pPr>
+            <a:r>
+              <a:rPr sz="1500">
+                <a:solidFill>
+                  <a:srgbClr val="22282E"/>
+                </a:solidFill>
+              </a:rPr>
+              <a:t>•  Frontera de confianza — Punto donde cambia quién controla o valida una interacción.</a:t>
+            </a:r>
+          </a:p>
+          <a:p>
+            <a:pPr>
+              <a:spcAft>
+                <a:spcPts val="600"/>
+              </a:spcAft>
+            </a:pPr>
+            <a:r>
+              <a:rPr sz="1500">
+                <a:solidFill>
+                  <a:srgbClr val="22282E"/>
+                </a:solidFill>
+              </a:rPr>
+              <a:t>•  DFD — Representación de entidades, procesos, almacenes y flujos de datos.</a:t>
+            </a:r>
+          </a:p>
+          <a:p>
+            <a:pPr>
+              <a:spcAft>
+                <a:spcPts val="600"/>
+              </a:spcAft>
+            </a:pPr>
+            <a:r>
+              <a:rPr sz="1500">
+                <a:solidFill>
+                  <a:srgbClr val="22282E"/>
+                </a:solidFill>
+              </a:rPr>
+              <a:t>•  Escenario de amenaza — Cadena concreta de precondición, acción, activo e impacto.</a:t>
+            </a:r>
+          </a:p>
+          <a:p>
+            <a:pPr>
+              <a:spcAft>
+                <a:spcPts val="600"/>
+              </a:spcAft>
+            </a:pPr>
+            <a:r>
+              <a:rPr sz="1500">
+                <a:solidFill>
+                  <a:srgbClr val="22282E"/>
+                </a:solidFill>
+              </a:rPr>
+              <a:t>•  Mitigación — Cambio que reduce probabilidad o impacto y puede verificarse.</a:t>
             </a:r>
           </a:p>
         </p:txBody>
@@ -4495,7 +5066,7 @@
                   <a:srgbClr val="0B3D2E"/>
                 </a:solidFill>
               </a:rPr>
-              <a:t>🧪 Laboratorio guiado</a:t>
+              <a:t>✅ Criterio de dominio</a:t>
             </a:r>
           </a:p>
         </p:txBody>
@@ -4533,97 +5104,7 @@
                   <a:srgbClr val="22282E"/>
                 </a:solidFill>
               </a:rPr>
-              <a:t>•  Modelaremos una app web de ejemplo: navegador → API → base de datos, con login.</a:t>
-            </a:r>
-          </a:p>
-          <a:p>
-            <a:pPr>
-              <a:spcAft>
-                <a:spcPts val="600"/>
-              </a:spcAft>
-            </a:pPr>
-            <a:r>
-              <a:rPr sz="1500">
-                <a:solidFill>
-                  <a:srgbClr val="22282E"/>
-                </a:solidFill>
-              </a:rPr>
-              <a:t>•  Define el alcance. Sistema: API REST de una tienda con autenticación por JWT, base de datos PostgreSQL y un servicio de pagos externo.</a:t>
-            </a:r>
-          </a:p>
-          <a:p>
-            <a:pPr>
-              <a:spcAft>
-                <a:spcPts val="600"/>
-              </a:spcAft>
-            </a:pPr>
-            <a:r>
-              <a:rPr sz="1500">
-                <a:solidFill>
-                  <a:srgbClr val="22282E"/>
-                </a:solidFill>
-              </a:rPr>
-              <a:t>•  Dibuja el DFD. Entidades externas (usuario, pasarela de pago), procesos (API, servicio de auth), almacén (DB), flujos entre ellos. Marca trust boundaries: internet↔API, API↔DB, API↔pasarela.</a:t>
-            </a:r>
-          </a:p>
-          <a:p>
-            <a:pPr>
-              <a:spcAft>
-                <a:spcPts val="600"/>
-              </a:spcAft>
-            </a:pPr>
-            <a:r>
-              <a:rPr sz="1500">
-                <a:solidFill>
-                  <a:srgbClr val="22282E"/>
-                </a:solidFill>
-              </a:rPr>
-              <a:t>•  Aplica STRIDE por elemento. Para el flujo "usuario → API login": Spoofing (¿se puede suplantar al usuario?), Tampering (¿se puede alterar el request?), etc. Rellena la tabla.</a:t>
-            </a:r>
-          </a:p>
-          <a:p>
-            <a:pPr>
-              <a:spcAft>
-                <a:spcPts val="600"/>
-              </a:spcAft>
-            </a:pPr>
-            <a:r>
-              <a:rPr sz="1500">
-                <a:solidFill>
-                  <a:srgbClr val="22282E"/>
-                </a:solidFill>
-              </a:rPr>
-              <a:t>•  Modela como código con pytm. Ejemplo mínimo:</a:t>
-            </a:r>
-          </a:p>
-          <a:p>
-            <a:pPr>
-              <a:spcAft>
-                <a:spcPts val="600"/>
-              </a:spcAft>
-            </a:pPr>
-            <a:r>
-              <a:rPr sz="1500">
-                <a:solidFill>
-                  <a:srgbClr val="22282E"/>
-                </a:solidFill>
-              </a:rPr>
-              <a:t>•  from pytm import TM, Server, Datastore, Dataflow, Boundary, Actor</a:t>
-            </a:r>
-          </a:p>
-          <a:p>
-            <a:pPr>
-              <a:spcAft>
-                <a:spcPts val="600"/>
-              </a:spcAft>
-            </a:pPr>
-            <a:r>
-              <a:rPr sz="1500">
-                <a:solidFill>
-                  <a:srgbClr val="22282E"/>
-                </a:solidFill>
-              </a:rPr>
-              <a:t>•  tm = TM("Tienda API")</a:t>
+              <a:t>•  El alumno domina la técnica cuando puede justificar el alcance de un DFD, encontrar amenazas específicas en sus cruces, evitar duplicados vagos, priorizar sin falsa precisión y convertir cada…</a:t>
             </a:r>
           </a:p>
         </p:txBody>
@@ -4674,7 +5155,7 @@
                   <a:srgbClr val="0B3D2E"/>
                 </a:solidFill>
               </a:rPr>
-              <a:t>✍️ Ejercicios</a:t>
+              <a:t>📖 Definiciones y características</a:t>
             </a:r>
           </a:p>
         </p:txBody>
@@ -4712,82 +5193,82 @@
                   <a:srgbClr val="22282E"/>
                 </a:solidFill>
               </a:rPr>
-              <a:t>•  Dibuja el DFD de un formulario de contacto con almacenamiento en base de datos.</a:t>
-            </a:r>
-          </a:p>
-          <a:p>
-            <a:pPr>
-              <a:spcAft>
-                <a:spcPts val="600"/>
-              </a:spcAft>
-            </a:pPr>
-            <a:r>
-              <a:rPr sz="1500">
-                <a:solidFill>
-                  <a:srgbClr val="22282E"/>
-                </a:solidFill>
-              </a:rPr>
-              <a:t>•  Aplica STRIDE al flujo "API → servicio de pagos externo" y lista 6 amenazas.</a:t>
-            </a:r>
-          </a:p>
-          <a:p>
-            <a:pPr>
-              <a:spcAft>
-                <a:spcPts val="600"/>
-              </a:spcAft>
-            </a:pPr>
-            <a:r>
-              <a:rPr sz="1500">
-                <a:solidFill>
-                  <a:srgbClr val="22282E"/>
-                </a:solidFill>
-              </a:rPr>
-              <a:t>•  Puntúa dos amenazas con DREAD y argumenta por qué el scoring es discutible.</a:t>
-            </a:r>
-          </a:p>
-          <a:p>
-            <a:pPr>
-              <a:spcAft>
-                <a:spcPts val="600"/>
-              </a:spcAft>
-            </a:pPr>
-            <a:r>
-              <a:rPr sz="1500">
-                <a:solidFill>
-                  <a:srgbClr val="22282E"/>
-                </a:solidFill>
-              </a:rPr>
-              <a:t>•  Convierte tres amenazas en requisitos de seguridad verificables.</a:t>
-            </a:r>
-          </a:p>
-          <a:p>
-            <a:pPr>
-              <a:spcAft>
-                <a:spcPts val="600"/>
-              </a:spcAft>
-            </a:pPr>
-            <a:r>
-              <a:rPr sz="1500">
-                <a:solidFill>
-                  <a:srgbClr val="22282E"/>
-                </a:solidFill>
-              </a:rPr>
-              <a:t>•  Modela con pytm un sistema con dos trust boundaries y genera el informe.</a:t>
-            </a:r>
-          </a:p>
-          <a:p>
-            <a:pPr>
-              <a:spcAft>
-                <a:spcPts val="600"/>
-              </a:spcAft>
-            </a:pPr>
-            <a:r>
-              <a:rPr sz="1500">
-                <a:solidFill>
-                  <a:srgbClr val="22282E"/>
-                </a:solidFill>
-              </a:rPr>
-              <a:t>•  Propón una alternativa a DREAD y justifica cuándo la usarías.</a:t>
+              <a:t>•  Modelo de amenazas: representación estructurada de qué puede atacar a un sistema y cómo mitigarlo. Característica: se hace en fase de diseño, es barato y preventivo.</a:t>
+            </a:r>
+          </a:p>
+          <a:p>
+            <a:pPr>
+              <a:spcAft>
+                <a:spcPts val="600"/>
+              </a:spcAft>
+            </a:pPr>
+            <a:r>
+              <a:rPr sz="1500">
+                <a:solidFill>
+                  <a:srgbClr val="22282E"/>
+                </a:solidFill>
+              </a:rPr>
+              <a:t>•  DFD: diagrama con procesos, almacenes de datos, flujos y entidades externas. Característica: los cruces de trust boundary son los puntos calientes.</a:t>
+            </a:r>
+          </a:p>
+          <a:p>
+            <a:pPr>
+              <a:spcAft>
+                <a:spcPts val="600"/>
+              </a:spcAft>
+            </a:pPr>
+            <a:r>
+              <a:rPr sz="1500">
+                <a:solidFill>
+                  <a:srgbClr val="22282E"/>
+                </a:solidFill>
+              </a:rPr>
+              <a:t>•  STRIDE: Spoofing, Tampering, Repudiation, Information disclosure, Denial of service, Elevation of privilege. Característica: cada categoría se opone a una propiedad de seguridad (autenticación…</a:t>
+            </a:r>
+          </a:p>
+          <a:p>
+            <a:pPr>
+              <a:spcAft>
+                <a:spcPts val="600"/>
+              </a:spcAft>
+            </a:pPr>
+            <a:r>
+              <a:rPr sz="1500">
+                <a:solidFill>
+                  <a:srgbClr val="22282E"/>
+                </a:solidFill>
+              </a:rPr>
+              <a:t>•  DREAD: Damage, Reproducibility, Exploitability, Affected users, Discoverability. Característica: scoring 1–10 por eje; útil pero subjetivo, Microsoft lo abandonó por inconsistencia.</a:t>
+            </a:r>
+          </a:p>
+          <a:p>
+            <a:pPr>
+              <a:spcAft>
+                <a:spcPts val="600"/>
+              </a:spcAft>
+            </a:pPr>
+            <a:r>
+              <a:rPr sz="1500">
+                <a:solidFill>
+                  <a:srgbClr val="22282E"/>
+                </a:solidFill>
+              </a:rPr>
+              <a:t>•  Trust boundary: frontera donde datos o control pasan entre niveles de confianza distintos. Característica: internet↔DMZ, usuario↔proceso, contenedor↔host.</a:t>
+            </a:r>
+          </a:p>
+          <a:p>
+            <a:pPr>
+              <a:spcAft>
+                <a:spcPts val="600"/>
+              </a:spcAft>
+            </a:pPr>
+            <a:r>
+              <a:rPr sz="1500">
+                <a:solidFill>
+                  <a:srgbClr val="22282E"/>
+                </a:solidFill>
+              </a:rPr>
+              <a:t>•  Contramedida (mitigación): control que reduce la probabilidad o el impacto de una amenaza. Característica: se traduce en requisito verificable.</a:t>
             </a:r>
           </a:p>
         </p:txBody>
@@ -4838,7 +5319,7 @@
                   <a:srgbClr val="0B3D2E"/>
                 </a:solidFill>
               </a:rPr>
-              <a:t>📝 Reto verificable</a:t>
+              <a:t>🧰 Herramientas y preparación</a:t>
             </a:r>
           </a:p>
         </p:txBody>
@@ -4876,67 +5357,67 @@
                   <a:srgbClr val="22282E"/>
                 </a:solidFill>
               </a:rPr>
-              <a:t>•  Entrega un modelo de amenazas completo de un sistema con al menos dos trust boundaries.</a:t>
-            </a:r>
-          </a:p>
-          <a:p>
-            <a:pPr>
-              <a:spcAft>
-                <a:spcPts val="600"/>
-              </a:spcAft>
-            </a:pPr>
-            <a:r>
-              <a:rPr sz="1500">
-                <a:solidFill>
-                  <a:srgbClr val="22282E"/>
-                </a:solidFill>
-              </a:rPr>
-              <a:t>•  Criterio de aceptación: incluye (a) un DFD con procesos, almacenes, flujos y límites de</a:t>
-            </a:r>
-          </a:p>
-          <a:p>
-            <a:pPr>
-              <a:spcAft>
-                <a:spcPts val="600"/>
-              </a:spcAft>
-            </a:pPr>
-            <a:r>
-              <a:rPr sz="1500">
-                <a:solidFill>
-                  <a:srgbClr val="22282E"/>
-                </a:solidFill>
-              </a:rPr>
-              <a:t>•  confianza; (b) una tabla STRIDE con mínimo 8 amenazas categorizadas; (c) priorización</a:t>
-            </a:r>
-          </a:p>
-          <a:p>
-            <a:pPr>
-              <a:spcAft>
-                <a:spcPts val="600"/>
-              </a:spcAft>
-            </a:pPr>
-            <a:r>
-              <a:rPr sz="1500">
-                <a:solidFill>
-                  <a:srgbClr val="22282E"/>
-                </a:solidFill>
-              </a:rPr>
-              <a:t>•  justificada de al menos 5; y (d) una contramedida/requisito verificable por cada amenaza</a:t>
-            </a:r>
-          </a:p>
-          <a:p>
-            <a:pPr>
-              <a:spcAft>
-                <a:spcPts val="600"/>
-              </a:spcAft>
-            </a:pPr>
-            <a:r>
-              <a:rPr sz="1500">
-                <a:solidFill>
-                  <a:srgbClr val="22282E"/>
-                </a:solidFill>
-              </a:rPr>
-              <a:t>•  priorizada. El modelo debe ser versionable (Threat Dragon JSON o pytm).</a:t>
+              <a:t>•  OWASP Threat Dragon (app de escritorio/web) para dibujar DFD y anotar amenazas STRIDE.</a:t>
+            </a:r>
+          </a:p>
+          <a:p>
+            <a:pPr>
+              <a:spcAft>
+                <a:spcPts val="600"/>
+              </a:spcAft>
+            </a:pPr>
+            <a:r>
+              <a:rPr sz="1500">
+                <a:solidFill>
+                  <a:srgbClr val="22282E"/>
+                </a:solidFill>
+              </a:rPr>
+              <a:t>•  pytm (Python) para modelar amenazas como código y generar el DFD e informe.</a:t>
+            </a:r>
+          </a:p>
+          <a:p>
+            <a:pPr>
+              <a:spcAft>
+                <a:spcPts val="600"/>
+              </a:spcAft>
+            </a:pPr>
+            <a:r>
+              <a:rPr sz="1500">
+                <a:solidFill>
+                  <a:srgbClr val="22282E"/>
+                </a:solidFill>
+              </a:rPr>
+              <a:t>•  Microsoft Threat Modeling Tool (Windows) como alternativa gráfica.</a:t>
+            </a:r>
+          </a:p>
+          <a:p>
+            <a:pPr>
+              <a:spcAft>
+                <a:spcPts val="600"/>
+              </a:spcAft>
+            </a:pPr>
+            <a:r>
+              <a:rPr sz="1500">
+                <a:solidFill>
+                  <a:srgbClr val="22282E"/>
+                </a:solidFill>
+              </a:rPr>
+              <a:t>•  Plantilla de tabla de amenazas (elemento | STRIDE | descripción | riesgo | mitigación).</a:t>
+            </a:r>
+          </a:p>
+          <a:p>
+            <a:pPr>
+              <a:spcAft>
+                <a:spcPts val="600"/>
+              </a:spcAft>
+            </a:pPr>
+            <a:r>
+              <a:rPr sz="1500">
+                <a:solidFill>
+                  <a:srgbClr val="22282E"/>
+                </a:solidFill>
+              </a:rPr>
+              <a:t>•  Instalación de pytm:</a:t>
             </a:r>
           </a:p>
         </p:txBody>
